--- a/hercules2026_C_photon_transport.pptx
+++ b/hercules2026_C_photon_transport.pptx
@@ -247,7 +247,7 @@
             <a:fld id="{D680E798-53FF-4C51-A981-953463752515}" type="datetimeFigureOut">
               <a:rPr lang="fr-FR" smtClean="0"/>
               <a:pPr/>
-              <a:t>20/03/2025</a:t>
+              <a:t>23/02/2026</a:t>
             </a:fld>
             <a:endParaRPr lang="fr-FR"/>
           </a:p>
@@ -764,7 +764,7 @@
           <a:p>
             <a:r>
               <a:rPr lang="en-US" noProof="0"/>
-              <a:t>OASYS-Photon transport | HERCULES2025</a:t>
+              <a:t>OASYS-Photon transport | HERCULES2026</a:t>
             </a:r>
             <a:endParaRPr lang="en-US" noProof="0" dirty="0"/>
           </a:p>
@@ -1093,7 +1093,7 @@
           <a:p>
             <a:r>
               <a:rPr lang="en-US" noProof="0"/>
-              <a:t>OASYS-Photon transport | HERCULES2025</a:t>
+              <a:t>OASYS-Photon transport | HERCULES2026</a:t>
             </a:r>
           </a:p>
         </p:txBody>
@@ -1280,7 +1280,7 @@
           <a:p>
             <a:r>
               <a:rPr lang="en-US" noProof="0"/>
-              <a:t>OASYS-Photon transport | HERCULES2025</a:t>
+              <a:t>OASYS-Photon transport | HERCULES2026</a:t>
             </a:r>
           </a:p>
         </p:txBody>
@@ -1399,7 +1399,7 @@
           <a:p>
             <a:r>
               <a:rPr lang="en-US" noProof="0"/>
-              <a:t>OASYS-Photon transport | HERCULES2025</a:t>
+              <a:t>OASYS-Photon transport | HERCULES2026</a:t>
             </a:r>
           </a:p>
         </p:txBody>
@@ -1632,7 +1632,7 @@
           <a:p>
             <a:r>
               <a:rPr lang="en-US"/>
-              <a:t>OASYS-Photon transport | HERCULES2025</a:t>
+              <a:t>OASYS-Photon transport | HERCULES2026</a:t>
             </a:r>
             <a:endParaRPr lang="fr-FR" dirty="0"/>
           </a:p>
@@ -2128,7 +2128,7 @@
           <a:p>
             <a:r>
               <a:rPr lang="en-US" noProof="0"/>
-              <a:t>OASYS-Photon transport | HERCULES2025</a:t>
+              <a:t>OASYS-Photon transport | HERCULES2026</a:t>
             </a:r>
           </a:p>
         </p:txBody>
@@ -4698,7 +4698,7 @@
           <a:p>
             <a:r>
               <a:rPr lang="en-US" noProof="0"/>
-              <a:t>OASYS-Photon transport | HERCULES2025</a:t>
+              <a:t>OASYS-Photon transport | HERCULES2026</a:t>
             </a:r>
             <a:endParaRPr lang="en-US" noProof="0" dirty="0"/>
           </a:p>
@@ -4998,7 +4998,7 @@
           <a:p>
             <a:r>
               <a:rPr lang="en-US" noProof="0"/>
-              <a:t>OASYS-Photon transport | HERCULES2025</a:t>
+              <a:t>OASYS-Photon transport | HERCULES2026</a:t>
             </a:r>
             <a:endParaRPr lang="en-US" noProof="0" dirty="0"/>
           </a:p>
@@ -5212,7 +5212,7 @@
           <a:p>
             <a:r>
               <a:rPr lang="en-US" noProof="0"/>
-              <a:t>OASYS-Photon transport | HERCULES2025</a:t>
+              <a:t>OASYS-Photon transport | HERCULES2026</a:t>
             </a:r>
             <a:endParaRPr lang="en-US" noProof="0" dirty="0"/>
           </a:p>
@@ -5336,7 +5336,7 @@
           <a:graphicData uri="http://schemas.openxmlformats.org/presentationml/2006/ole">
             <mc:AlternateContent xmlns:mc="http://schemas.openxmlformats.org/markup-compatibility/2006">
               <mc:Choice xmlns:v="urn:schemas-microsoft-com:vml" Requires="v">
-                <p:oleObj spid="_x0000_s1128" name="Equation" r:id="rId4" imgW="1332921" imgH="444307" progId="">
+                <p:oleObj spid="_x0000_s1131" name="Equation" r:id="rId4" imgW="1332921" imgH="444307" progId="">
                   <p:embed/>
                 </p:oleObj>
               </mc:Choice>
@@ -5443,7 +5443,7 @@
           <a:graphicData uri="http://schemas.openxmlformats.org/presentationml/2006/ole">
             <mc:AlternateContent xmlns:mc="http://schemas.openxmlformats.org/markup-compatibility/2006">
               <mc:Choice xmlns:v="urn:schemas-microsoft-com:vml" Requires="v">
-                <p:oleObj spid="_x0000_s1129" name="Equation" r:id="rId6" imgW="1574800" imgH="444500" progId="">
+                <p:oleObj spid="_x0000_s1132" name="Equation" r:id="rId6" imgW="1574800" imgH="444500" progId="">
                   <p:embed/>
                 </p:oleObj>
               </mc:Choice>
@@ -5550,7 +5550,7 @@
           <a:graphicData uri="http://schemas.openxmlformats.org/presentationml/2006/ole">
             <mc:AlternateContent xmlns:mc="http://schemas.openxmlformats.org/markup-compatibility/2006">
               <mc:Choice xmlns:v="urn:schemas-microsoft-com:vml" Requires="v">
-                <p:oleObj spid="_x0000_s1130" name="Equation" r:id="rId8" imgW="1244600" imgH="393700" progId="">
+                <p:oleObj spid="_x0000_s1133" name="Equation" r:id="rId8" imgW="1244600" imgH="393700" progId="">
                   <p:embed/>
                 </p:oleObj>
               </mc:Choice>
@@ -5975,7 +5975,7 @@
           <a:p>
             <a:r>
               <a:rPr lang="en-US" noProof="0"/>
-              <a:t>OASYS-Photon transport | HERCULES2025</a:t>
+              <a:t>OASYS-Photon transport | HERCULES2026</a:t>
             </a:r>
           </a:p>
         </p:txBody>
@@ -7044,14 +7044,14 @@
           </a:ln>
           <a:extLst>
             <a:ext uri="{909E8E84-426E-40dd-AFC4-6F175D3DCCD1}">
-              <a14:hiddenFill xmlns:a14="http://schemas.microsoft.com/office/drawing/2010/main" xmlns="">
+              <a14:hiddenFill xmlns="" xmlns:a14="http://schemas.microsoft.com/office/drawing/2010/main">
                 <a:solidFill>
                   <a:srgbClr val="FFFFFF"/>
                 </a:solidFill>
               </a14:hiddenFill>
             </a:ext>
             <a:ext uri="{91240B29-F687-4f45-9708-019B960494DF}">
-              <a14:hiddenLine xmlns:a14="http://schemas.microsoft.com/office/drawing/2010/main" xmlns="" w="9525">
+              <a14:hiddenLine xmlns="" xmlns:a14="http://schemas.microsoft.com/office/drawing/2010/main" w="9525">
                 <a:solidFill>
                   <a:srgbClr val="000000"/>
                 </a:solidFill>
@@ -7206,18 +7206,17 @@
           <a:p>
             <a:pPr algn="ctr"/>
             <a:r>
-              <a:rPr lang="en-US" sz="1167"/>
-              <a:t>March 21</a:t>
+              <a:rPr lang="en-US" sz="1167" dirty="0"/>
+              <a:t>March 5</a:t>
             </a:r>
             <a:r>
-              <a:rPr lang="en-US" sz="1167" baseline="30000"/>
-              <a:t>st</a:t>
+              <a:rPr lang="en-US" sz="1167" baseline="30000" dirty="0"/>
+              <a:t>th</a:t>
             </a:r>
             <a:r>
-              <a:rPr lang="en-US" sz="1167"/>
-              <a:t> 2025</a:t>
+              <a:rPr lang="en-US" sz="1167" dirty="0"/>
+              <a:t>, 2026</a:t>
             </a:r>
-            <a:endParaRPr lang="en-US" sz="1167" dirty="0"/>
           </a:p>
           <a:p>
             <a:pPr algn="ctr"/>
@@ -7302,7 +7301,7 @@
           <a:p>
             <a:r>
               <a:rPr lang="en-GB" sz="833"/>
-              <a:t>OASYS-Photon transport | HERCULES2025</a:t>
+              <a:t>OASYS-Photon transport | HERCULES2026</a:t>
             </a:r>
             <a:endParaRPr lang="fr-FR" sz="833" dirty="0"/>
           </a:p>
@@ -7619,7 +7618,7 @@
           <a:p>
             <a:r>
               <a:rPr lang="en-US" noProof="0"/>
-              <a:t>OASYS-Photon transport | HERCULES2025</a:t>
+              <a:t>OASYS-Photon transport | HERCULES2026</a:t>
             </a:r>
           </a:p>
         </p:txBody>
@@ -8060,7 +8059,7 @@
           <a:p>
             <a:r>
               <a:rPr lang="en-US" noProof="0"/>
-              <a:t>OASYS-Photon transport | HERCULES2025</a:t>
+              <a:t>OASYS-Photon transport | HERCULES2026</a:t>
             </a:r>
             <a:endParaRPr lang="en-US" noProof="0" dirty="0"/>
           </a:p>
@@ -8328,7 +8327,7 @@
           </a:ln>
           <a:extLst>
             <a:ext uri="{91240B29-F687-4f45-9708-019B960494DF}">
-              <a14:hiddenLine xmlns="" xmlns:a14="http://schemas.microsoft.com/office/drawing/2010/main" w="9525">
+              <a14:hiddenLine xmlns:a14="http://schemas.microsoft.com/office/drawing/2010/main" xmlns="" w="9525">
                 <a:solidFill>
                   <a:srgbClr val="000000"/>
                 </a:solidFill>
@@ -8402,7 +8401,7 @@
             </a:ln>
             <a:extLst>
               <a:ext uri="{909E8E84-426E-40dd-AFC4-6F175D3DCCD1}">
-                <a14:hiddenFill xmlns="" xmlns:a14="http://schemas.microsoft.com/office/drawing/2010/main">
+                <a14:hiddenFill xmlns:a14="http://schemas.microsoft.com/office/drawing/2010/main" xmlns="">
                   <a:noFill/>
                 </a14:hiddenFill>
               </a:ext>
@@ -8449,7 +8448,7 @@
             </a:ln>
             <a:extLst>
               <a:ext uri="{909E8E84-426E-40dd-AFC4-6F175D3DCCD1}">
-                <a14:hiddenFill xmlns="" xmlns:a14="http://schemas.microsoft.com/office/drawing/2010/main">
+                <a14:hiddenFill xmlns:a14="http://schemas.microsoft.com/office/drawing/2010/main" xmlns="">
                   <a:noFill/>
                 </a14:hiddenFill>
               </a:ext>
@@ -8496,7 +8495,7 @@
             </a:ln>
             <a:extLst>
               <a:ext uri="{909E8E84-426E-40dd-AFC4-6F175D3DCCD1}">
-                <a14:hiddenFill xmlns="" xmlns:a14="http://schemas.microsoft.com/office/drawing/2010/main">
+                <a14:hiddenFill xmlns:a14="http://schemas.microsoft.com/office/drawing/2010/main" xmlns="">
                   <a:noFill/>
                 </a14:hiddenFill>
               </a:ext>
@@ -8539,14 +8538,14 @@
           </a:ln>
           <a:extLst>
             <a:ext uri="{909E8E84-426E-40dd-AFC4-6F175D3DCCD1}">
-              <a14:hiddenFill xmlns="" xmlns:a14="http://schemas.microsoft.com/office/drawing/2010/main">
+              <a14:hiddenFill xmlns:a14="http://schemas.microsoft.com/office/drawing/2010/main" xmlns="">
                 <a:solidFill>
                   <a:srgbClr val="FFFFFF"/>
                 </a:solidFill>
               </a14:hiddenFill>
             </a:ext>
             <a:ext uri="{91240B29-F687-4f45-9708-019B960494DF}">
-              <a14:hiddenLine xmlns="" xmlns:a14="http://schemas.microsoft.com/office/drawing/2010/main" w="9525">
+              <a14:hiddenLine xmlns:a14="http://schemas.microsoft.com/office/drawing/2010/main" xmlns="" w="9525">
                 <a:solidFill>
                   <a:srgbClr val="000000"/>
                 </a:solidFill>
@@ -9026,7 +9025,7 @@
             </a:ln>
             <a:extLst>
               <a:ext uri="{909E8E84-426E-40dd-AFC4-6F175D3DCCD1}">
-                <a14:hiddenFill xmlns="" xmlns:a14="http://schemas.microsoft.com/office/drawing/2010/main">
+                <a14:hiddenFill xmlns:a14="http://schemas.microsoft.com/office/drawing/2010/main" xmlns="">
                   <a:noFill/>
                 </a14:hiddenFill>
               </a:ext>
@@ -9085,7 +9084,7 @@
             <a:graphicData uri="http://schemas.openxmlformats.org/presentationml/2006/ole">
               <mc:AlternateContent xmlns:mc="http://schemas.openxmlformats.org/markup-compatibility/2006">
                 <mc:Choice xmlns:v="urn:schemas-microsoft-com:vml" Requires="v">
-                  <p:oleObj spid="_x0000_s2098" name="Equation" r:id="rId4" imgW="152280" imgH="139680" progId="Equation.DSMT4">
+                  <p:oleObj spid="_x0000_s2100" name="Equation" r:id="rId4" imgW="152280" imgH="139680" progId="Equation.DSMT4">
                     <p:embed/>
                   </p:oleObj>
                 </mc:Choice>
@@ -9128,14 +9127,14 @@
                         <a:effectLst/>
                         <a:extLst>
                           <a:ext uri="{909E8E84-426E-40dd-AFC4-6F175D3DCCD1}">
-                            <a14:hiddenFill xmlns="" xmlns:a14="http://schemas.microsoft.com/office/drawing/2010/main">
+                            <a14:hiddenFill xmlns:a14="http://schemas.microsoft.com/office/drawing/2010/main" xmlns="">
                               <a:solidFill>
                                 <a:srgbClr val="FFFFFF"/>
                               </a:solidFill>
                             </a14:hiddenFill>
                           </a:ext>
                           <a:ext uri="{91240B29-F687-4f45-9708-019B960494DF}">
-                            <a14:hiddenLine xmlns="" xmlns:a14="http://schemas.microsoft.com/office/drawing/2010/main" w="9525">
+                            <a14:hiddenLine xmlns:a14="http://schemas.microsoft.com/office/drawing/2010/main" xmlns="" w="9525">
                               <a:solidFill>
                                 <a:srgbClr val="000000"/>
                               </a:solidFill>
@@ -9145,7 +9144,7 @@
                             </a14:hiddenLine>
                           </a:ext>
                           <a:ext uri="{AF507438-7753-43e0-B8FC-AC1667EBCBE1}">
-                            <a14:hiddenEffects xmlns="" xmlns:a14="http://schemas.microsoft.com/office/drawing/2010/main">
+                            <a14:hiddenEffects xmlns:a14="http://schemas.microsoft.com/office/drawing/2010/main" xmlns="">
                               <a:effectLst>
                                 <a:outerShdw dist="35921" dir="2700000" algn="ctr" rotWithShape="0">
                                   <a:srgbClr val="808080"/>
@@ -9368,7 +9367,7 @@
               </a:ln>
               <a:extLst>
                 <a:ext uri="{909E8E84-426E-40dd-AFC4-6F175D3DCCD1}">
-                  <a14:hiddenFill xmlns="" xmlns:a14="http://schemas.microsoft.com/office/drawing/2010/main">
+                  <a14:hiddenFill xmlns:a14="http://schemas.microsoft.com/office/drawing/2010/main" xmlns="">
                     <a:noFill/>
                   </a14:hiddenFill>
                 </a:ext>
@@ -9415,7 +9414,7 @@
               </a:ln>
               <a:extLst>
                 <a:ext uri="{909E8E84-426E-40dd-AFC4-6F175D3DCCD1}">
-                  <a14:hiddenFill xmlns="" xmlns:a14="http://schemas.microsoft.com/office/drawing/2010/main">
+                  <a14:hiddenFill xmlns:a14="http://schemas.microsoft.com/office/drawing/2010/main" xmlns="">
                     <a:noFill/>
                   </a14:hiddenFill>
                 </a:ext>
@@ -9462,7 +9461,7 @@
               </a:ln>
               <a:extLst>
                 <a:ext uri="{909E8E84-426E-40dd-AFC4-6F175D3DCCD1}">
-                  <a14:hiddenFill xmlns="" xmlns:a14="http://schemas.microsoft.com/office/drawing/2010/main">
+                  <a14:hiddenFill xmlns:a14="http://schemas.microsoft.com/office/drawing/2010/main" xmlns="">
                     <a:noFill/>
                   </a14:hiddenFill>
                 </a:ext>
@@ -9509,7 +9508,7 @@
               </a:ln>
               <a:extLst>
                 <a:ext uri="{909E8E84-426E-40dd-AFC4-6F175D3DCCD1}">
-                  <a14:hiddenFill xmlns="" xmlns:a14="http://schemas.microsoft.com/office/drawing/2010/main">
+                  <a14:hiddenFill xmlns:a14="http://schemas.microsoft.com/office/drawing/2010/main" xmlns="">
                     <a:noFill/>
                   </a14:hiddenFill>
                 </a:ext>
@@ -9556,7 +9555,7 @@
               </a:ln>
               <a:extLst>
                 <a:ext uri="{909E8E84-426E-40dd-AFC4-6F175D3DCCD1}">
-                  <a14:hiddenFill xmlns="" xmlns:a14="http://schemas.microsoft.com/office/drawing/2010/main">
+                  <a14:hiddenFill xmlns:a14="http://schemas.microsoft.com/office/drawing/2010/main" xmlns="">
                     <a:noFill/>
                   </a14:hiddenFill>
                 </a:ext>
@@ -9780,7 +9779,7 @@
             </a:ln>
             <a:extLst>
               <a:ext uri="{909E8E84-426E-40dd-AFC4-6F175D3DCCD1}">
-                <a14:hiddenFill xmlns="" xmlns:a14="http://schemas.microsoft.com/office/drawing/2010/main">
+                <a14:hiddenFill xmlns:a14="http://schemas.microsoft.com/office/drawing/2010/main" xmlns="">
                   <a:noFill/>
                 </a14:hiddenFill>
               </a:ext>
@@ -9822,14 +9821,14 @@
             </a:ln>
             <a:extLst>
               <a:ext uri="{909E8E84-426E-40dd-AFC4-6F175D3DCCD1}">
-                <a14:hiddenFill xmlns="" xmlns:a14="http://schemas.microsoft.com/office/drawing/2010/main">
+                <a14:hiddenFill xmlns:a14="http://schemas.microsoft.com/office/drawing/2010/main" xmlns="">
                   <a:solidFill>
                     <a:srgbClr val="FFFFFF"/>
                   </a:solidFill>
                 </a14:hiddenFill>
               </a:ext>
               <a:ext uri="{91240B29-F687-4f45-9708-019B960494DF}">
-                <a14:hiddenLine xmlns="" xmlns:a14="http://schemas.microsoft.com/office/drawing/2010/main" w="9525">
+                <a14:hiddenLine xmlns:a14="http://schemas.microsoft.com/office/drawing/2010/main" xmlns="" w="9525">
                   <a:solidFill>
                     <a:srgbClr val="000000"/>
                   </a:solidFill>
@@ -10226,7 +10225,7 @@
               </a:ln>
               <a:extLst>
                 <a:ext uri="{91240B29-F687-4f45-9708-019B960494DF}">
-                  <a14:hiddenLine xmlns="" xmlns:a14="http://schemas.microsoft.com/office/drawing/2010/main" w="9525">
+                  <a14:hiddenLine xmlns:a14="http://schemas.microsoft.com/office/drawing/2010/main" xmlns="" w="9525">
                     <a:solidFill>
                       <a:srgbClr val="000000"/>
                     </a:solidFill>
@@ -10278,7 +10277,7 @@
               </a:ln>
               <a:extLst>
                 <a:ext uri="{909E8E84-426E-40dd-AFC4-6F175D3DCCD1}">
-                  <a14:hiddenFill xmlns="" xmlns:a14="http://schemas.microsoft.com/office/drawing/2010/main">
+                  <a14:hiddenFill xmlns:a14="http://schemas.microsoft.com/office/drawing/2010/main" xmlns="">
                     <a:noFill/>
                   </a14:hiddenFill>
                 </a:ext>
@@ -10320,14 +10319,14 @@
               </a:ln>
               <a:extLst>
                 <a:ext uri="{909E8E84-426E-40dd-AFC4-6F175D3DCCD1}">
-                  <a14:hiddenFill xmlns="" xmlns:a14="http://schemas.microsoft.com/office/drawing/2010/main">
+                  <a14:hiddenFill xmlns:a14="http://schemas.microsoft.com/office/drawing/2010/main" xmlns="">
                     <a:solidFill>
                       <a:srgbClr val="FFFFFF"/>
                     </a:solidFill>
                   </a14:hiddenFill>
                 </a:ext>
                 <a:ext uri="{91240B29-F687-4f45-9708-019B960494DF}">
-                  <a14:hiddenLine xmlns="" xmlns:a14="http://schemas.microsoft.com/office/drawing/2010/main" w="9525">
+                  <a14:hiddenLine xmlns:a14="http://schemas.microsoft.com/office/drawing/2010/main" xmlns="" w="9525">
                     <a:solidFill>
                       <a:srgbClr val="000000"/>
                     </a:solidFill>
@@ -10497,14 +10496,14 @@
               </a:ln>
               <a:extLst>
                 <a:ext uri="{909E8E84-426E-40dd-AFC4-6F175D3DCCD1}">
-                  <a14:hiddenFill xmlns="" xmlns:a14="http://schemas.microsoft.com/office/drawing/2010/main">
+                  <a14:hiddenFill xmlns:a14="http://schemas.microsoft.com/office/drawing/2010/main" xmlns="">
                     <a:solidFill>
                       <a:srgbClr val="FFFFFF"/>
                     </a:solidFill>
                   </a14:hiddenFill>
                 </a:ext>
                 <a:ext uri="{91240B29-F687-4f45-9708-019B960494DF}">
-                  <a14:hiddenLine xmlns="" xmlns:a14="http://schemas.microsoft.com/office/drawing/2010/main" w="9525">
+                  <a14:hiddenLine xmlns:a14="http://schemas.microsoft.com/office/drawing/2010/main" xmlns="" w="9525">
                     <a:solidFill>
                       <a:srgbClr val="000000"/>
                     </a:solidFill>
@@ -10674,14 +10673,14 @@
               </a:ln>
               <a:extLst>
                 <a:ext uri="{909E8E84-426E-40dd-AFC4-6F175D3DCCD1}">
-                  <a14:hiddenFill xmlns="" xmlns:a14="http://schemas.microsoft.com/office/drawing/2010/main">
+                  <a14:hiddenFill xmlns:a14="http://schemas.microsoft.com/office/drawing/2010/main" xmlns="">
                     <a:solidFill>
                       <a:srgbClr val="FFFFFF"/>
                     </a:solidFill>
                   </a14:hiddenFill>
                 </a:ext>
                 <a:ext uri="{91240B29-F687-4f45-9708-019B960494DF}">
-                  <a14:hiddenLine xmlns="" xmlns:a14="http://schemas.microsoft.com/office/drawing/2010/main" w="9525">
+                  <a14:hiddenLine xmlns:a14="http://schemas.microsoft.com/office/drawing/2010/main" xmlns="" w="9525">
                     <a:solidFill>
                       <a:srgbClr val="000000"/>
                     </a:solidFill>
@@ -10879,7 +10878,7 @@
               </a:ln>
               <a:extLst>
                 <a:ext uri="{909E8E84-426E-40dd-AFC4-6F175D3DCCD1}">
-                  <a14:hiddenFill xmlns="" xmlns:a14="http://schemas.microsoft.com/office/drawing/2010/main">
+                  <a14:hiddenFill xmlns:a14="http://schemas.microsoft.com/office/drawing/2010/main" xmlns="">
                     <a:noFill/>
                   </a14:hiddenFill>
                 </a:ext>
@@ -10926,7 +10925,7 @@
               </a:ln>
               <a:extLst>
                 <a:ext uri="{909E8E84-426E-40dd-AFC4-6F175D3DCCD1}">
-                  <a14:hiddenFill xmlns="" xmlns:a14="http://schemas.microsoft.com/office/drawing/2010/main">
+                  <a14:hiddenFill xmlns:a14="http://schemas.microsoft.com/office/drawing/2010/main" xmlns="">
                     <a:noFill/>
                   </a14:hiddenFill>
                 </a:ext>
@@ -10973,7 +10972,7 @@
               </a:ln>
               <a:extLst>
                 <a:ext uri="{909E8E84-426E-40dd-AFC4-6F175D3DCCD1}">
-                  <a14:hiddenFill xmlns="" xmlns:a14="http://schemas.microsoft.com/office/drawing/2010/main">
+                  <a14:hiddenFill xmlns:a14="http://schemas.microsoft.com/office/drawing/2010/main" xmlns="">
                     <a:noFill/>
                   </a14:hiddenFill>
                 </a:ext>
@@ -11015,14 +11014,14 @@
               </a:ln>
               <a:extLst>
                 <a:ext uri="{909E8E84-426E-40dd-AFC4-6F175D3DCCD1}">
-                  <a14:hiddenFill xmlns="" xmlns:a14="http://schemas.microsoft.com/office/drawing/2010/main">
+                  <a14:hiddenFill xmlns:a14="http://schemas.microsoft.com/office/drawing/2010/main" xmlns="">
                     <a:solidFill>
                       <a:srgbClr val="FFFFFF"/>
                     </a:solidFill>
                   </a14:hiddenFill>
                 </a:ext>
                 <a:ext uri="{91240B29-F687-4f45-9708-019B960494DF}">
-                  <a14:hiddenLine xmlns="" xmlns:a14="http://schemas.microsoft.com/office/drawing/2010/main" w="9525">
+                  <a14:hiddenLine xmlns:a14="http://schemas.microsoft.com/office/drawing/2010/main" xmlns="" w="9525">
                     <a:solidFill>
                       <a:srgbClr val="000000"/>
                     </a:solidFill>
@@ -11199,7 +11198,7 @@
           </a:ln>
           <a:extLst>
             <a:ext uri="{909E8E84-426E-40dd-AFC4-6F175D3DCCD1}">
-              <a14:hiddenFill xmlns="" xmlns:a14="http://schemas.microsoft.com/office/drawing/2010/main">
+              <a14:hiddenFill xmlns:a14="http://schemas.microsoft.com/office/drawing/2010/main" xmlns="">
                 <a:noFill/>
               </a14:hiddenFill>
             </a:ext>
@@ -11241,14 +11240,14 @@
           </a:ln>
           <a:extLst>
             <a:ext uri="{909E8E84-426E-40dd-AFC4-6F175D3DCCD1}">
-              <a14:hiddenFill xmlns="" xmlns:a14="http://schemas.microsoft.com/office/drawing/2010/main">
+              <a14:hiddenFill xmlns:a14="http://schemas.microsoft.com/office/drawing/2010/main" xmlns="">
                 <a:solidFill>
                   <a:srgbClr val="FFFFFF"/>
                 </a:solidFill>
               </a14:hiddenFill>
             </a:ext>
             <a:ext uri="{91240B29-F687-4f45-9708-019B960494DF}">
-              <a14:hiddenLine xmlns="" xmlns:a14="http://schemas.microsoft.com/office/drawing/2010/main" w="9525">
+              <a14:hiddenLine xmlns:a14="http://schemas.microsoft.com/office/drawing/2010/main" xmlns="" w="9525">
                 <a:solidFill>
                   <a:srgbClr val="000000"/>
                 </a:solidFill>
@@ -11418,14 +11417,14 @@
           </a:ln>
           <a:extLst>
             <a:ext uri="{909E8E84-426E-40dd-AFC4-6F175D3DCCD1}">
-              <a14:hiddenFill xmlns="" xmlns:a14="http://schemas.microsoft.com/office/drawing/2010/main">
+              <a14:hiddenFill xmlns:a14="http://schemas.microsoft.com/office/drawing/2010/main" xmlns="">
                 <a:solidFill>
                   <a:srgbClr val="FFFFFF"/>
                 </a:solidFill>
               </a14:hiddenFill>
             </a:ext>
             <a:ext uri="{91240B29-F687-4f45-9708-019B960494DF}">
-              <a14:hiddenLine xmlns="" xmlns:a14="http://schemas.microsoft.com/office/drawing/2010/main" w="9525">
+              <a14:hiddenLine xmlns:a14="http://schemas.microsoft.com/office/drawing/2010/main" xmlns="" w="9525">
                 <a:solidFill>
                   <a:srgbClr val="000000"/>
                 </a:solidFill>
@@ -11678,7 +11677,7 @@
             </a:ln>
             <a:extLst>
               <a:ext uri="{909E8E84-426E-40dd-AFC4-6F175D3DCCD1}">
-                <a14:hiddenFill xmlns="" xmlns:a14="http://schemas.microsoft.com/office/drawing/2010/main">
+                <a14:hiddenFill xmlns:a14="http://schemas.microsoft.com/office/drawing/2010/main" xmlns="">
                   <a:solidFill>
                     <a:srgbClr val="FFFFFF"/>
                   </a:solidFill>
@@ -11716,7 +11715,7 @@
             <a:graphicData uri="http://schemas.openxmlformats.org/presentationml/2006/ole">
               <mc:AlternateContent xmlns:mc="http://schemas.openxmlformats.org/markup-compatibility/2006">
                 <mc:Choice xmlns:v="urn:schemas-microsoft-com:vml" Requires="v">
-                  <p:oleObj spid="_x0000_s2099" name="Equation" r:id="rId6" imgW="152280" imgH="228600" progId="Equation.DSMT4">
+                  <p:oleObj spid="_x0000_s2101" name="Equation" r:id="rId6" imgW="152280" imgH="228600" progId="Equation.DSMT4">
                     <p:embed/>
                   </p:oleObj>
                 </mc:Choice>
@@ -11759,14 +11758,14 @@
                         <a:effectLst/>
                         <a:extLst>
                           <a:ext uri="{909E8E84-426E-40dd-AFC4-6F175D3DCCD1}">
-                            <a14:hiddenFill xmlns="" xmlns:a14="http://schemas.microsoft.com/office/drawing/2010/main">
+                            <a14:hiddenFill xmlns:a14="http://schemas.microsoft.com/office/drawing/2010/main" xmlns="">
                               <a:solidFill>
                                 <a:srgbClr val="FFFFFF"/>
                               </a:solidFill>
                             </a14:hiddenFill>
                           </a:ext>
                           <a:ext uri="{91240B29-F687-4f45-9708-019B960494DF}">
-                            <a14:hiddenLine xmlns="" xmlns:a14="http://schemas.microsoft.com/office/drawing/2010/main" w="9525">
+                            <a14:hiddenLine xmlns:a14="http://schemas.microsoft.com/office/drawing/2010/main" xmlns="" w="9525">
                               <a:solidFill>
                                 <a:srgbClr val="000000"/>
                               </a:solidFill>
@@ -11776,7 +11775,7 @@
                             </a14:hiddenLine>
                           </a:ext>
                           <a:ext uri="{AF507438-7753-43e0-B8FC-AC1667EBCBE1}">
-                            <a14:hiddenEffects xmlns="" xmlns:a14="http://schemas.microsoft.com/office/drawing/2010/main">
+                            <a14:hiddenEffects xmlns:a14="http://schemas.microsoft.com/office/drawing/2010/main" xmlns="">
                               <a:effectLst>
                                 <a:outerShdw dist="35921" dir="2700000" algn="ctr" rotWithShape="0">
                                   <a:srgbClr val="808080"/>
@@ -11870,7 +11869,7 @@
                 </a:ln>
                 <a:extLst>
                   <a:ext uri="{909E8E84-426E-40dd-AFC4-6F175D3DCCD1}">
-                    <a14:hiddenFill xmlns="" xmlns:a14="http://schemas.microsoft.com/office/drawing/2010/main">
+                    <a14:hiddenFill xmlns:a14="http://schemas.microsoft.com/office/drawing/2010/main" xmlns="">
                       <a:noFill/>
                     </a14:hiddenFill>
                   </a:ext>
@@ -11917,7 +11916,7 @@
                 </a:ln>
                 <a:extLst>
                   <a:ext uri="{909E8E84-426E-40dd-AFC4-6F175D3DCCD1}">
-                    <a14:hiddenFill xmlns="" xmlns:a14="http://schemas.microsoft.com/office/drawing/2010/main">
+                    <a14:hiddenFill xmlns:a14="http://schemas.microsoft.com/office/drawing/2010/main" xmlns="">
                       <a:noFill/>
                     </a14:hiddenFill>
                   </a:ext>
@@ -11964,7 +11963,7 @@
                 </a:ln>
                 <a:extLst>
                   <a:ext uri="{909E8E84-426E-40dd-AFC4-6F175D3DCCD1}">
-                    <a14:hiddenFill xmlns="" xmlns:a14="http://schemas.microsoft.com/office/drawing/2010/main">
+                    <a14:hiddenFill xmlns:a14="http://schemas.microsoft.com/office/drawing/2010/main" xmlns="">
                       <a:noFill/>
                     </a14:hiddenFill>
                   </a:ext>
@@ -12007,14 +12006,14 @@
               </a:ln>
               <a:extLst>
                 <a:ext uri="{909E8E84-426E-40dd-AFC4-6F175D3DCCD1}">
-                  <a14:hiddenFill xmlns="" xmlns:a14="http://schemas.microsoft.com/office/drawing/2010/main">
+                  <a14:hiddenFill xmlns:a14="http://schemas.microsoft.com/office/drawing/2010/main" xmlns="">
                     <a:solidFill>
                       <a:srgbClr val="FFFFFF"/>
                     </a:solidFill>
                   </a14:hiddenFill>
                 </a:ext>
                 <a:ext uri="{91240B29-F687-4f45-9708-019B960494DF}">
-                  <a14:hiddenLine xmlns="" xmlns:a14="http://schemas.microsoft.com/office/drawing/2010/main" w="9525">
+                  <a14:hiddenLine xmlns:a14="http://schemas.microsoft.com/office/drawing/2010/main" xmlns="" w="9525">
                     <a:solidFill>
                       <a:srgbClr val="000000"/>
                     </a:solidFill>
@@ -12184,14 +12183,14 @@
               </a:ln>
               <a:extLst>
                 <a:ext uri="{909E8E84-426E-40dd-AFC4-6F175D3DCCD1}">
-                  <a14:hiddenFill xmlns="" xmlns:a14="http://schemas.microsoft.com/office/drawing/2010/main">
+                  <a14:hiddenFill xmlns:a14="http://schemas.microsoft.com/office/drawing/2010/main" xmlns="">
                     <a:solidFill>
                       <a:srgbClr val="FFFFFF"/>
                     </a:solidFill>
                   </a14:hiddenFill>
                 </a:ext>
                 <a:ext uri="{91240B29-F687-4f45-9708-019B960494DF}">
-                  <a14:hiddenLine xmlns="" xmlns:a14="http://schemas.microsoft.com/office/drawing/2010/main" w="9525">
+                  <a14:hiddenLine xmlns:a14="http://schemas.microsoft.com/office/drawing/2010/main" xmlns="" w="9525">
                     <a:solidFill>
                       <a:srgbClr val="000000"/>
                     </a:solidFill>
@@ -12361,14 +12360,14 @@
               </a:ln>
               <a:extLst>
                 <a:ext uri="{909E8E84-426E-40dd-AFC4-6F175D3DCCD1}">
-                  <a14:hiddenFill xmlns="" xmlns:a14="http://schemas.microsoft.com/office/drawing/2010/main">
+                  <a14:hiddenFill xmlns:a14="http://schemas.microsoft.com/office/drawing/2010/main" xmlns="">
                     <a:solidFill>
                       <a:srgbClr val="FFFFFF"/>
                     </a:solidFill>
                   </a14:hiddenFill>
                 </a:ext>
                 <a:ext uri="{91240B29-F687-4f45-9708-019B960494DF}">
-                  <a14:hiddenLine xmlns="" xmlns:a14="http://schemas.microsoft.com/office/drawing/2010/main" w="9525">
+                  <a14:hiddenLine xmlns:a14="http://schemas.microsoft.com/office/drawing/2010/main" xmlns="" w="9525">
                     <a:solidFill>
                       <a:srgbClr val="000000"/>
                     </a:solidFill>
@@ -12567,7 +12566,7 @@
             </a:ln>
             <a:extLst>
               <a:ext uri="{909E8E84-426E-40dd-AFC4-6F175D3DCCD1}">
-                <a14:hiddenFill xmlns="" xmlns:a14="http://schemas.microsoft.com/office/drawing/2010/main">
+                <a14:hiddenFill xmlns:a14="http://schemas.microsoft.com/office/drawing/2010/main" xmlns="">
                   <a:noFill/>
                 </a14:hiddenFill>
               </a:ext>
@@ -13021,7 +13020,7 @@
             </a:ln>
             <a:extLst>
               <a:ext uri="{909E8E84-426E-40dd-AFC4-6F175D3DCCD1}">
-                <a14:hiddenFill xmlns="" xmlns:a14="http://schemas.microsoft.com/office/drawing/2010/main">
+                <a14:hiddenFill xmlns:a14="http://schemas.microsoft.com/office/drawing/2010/main" xmlns="">
                   <a:noFill/>
                 </a14:hiddenFill>
               </a:ext>
@@ -13068,7 +13067,7 @@
             </a:ln>
             <a:extLst>
               <a:ext uri="{909E8E84-426E-40dd-AFC4-6F175D3DCCD1}">
-                <a14:hiddenFill xmlns="" xmlns:a14="http://schemas.microsoft.com/office/drawing/2010/main">
+                <a14:hiddenFill xmlns:a14="http://schemas.microsoft.com/office/drawing/2010/main" xmlns="">
                   <a:noFill/>
                 </a14:hiddenFill>
               </a:ext>
@@ -13624,7 +13623,7 @@
                 </a:ln>
                 <a:extLst>
                   <a:ext uri="{909E8E84-426E-40dd-AFC4-6F175D3DCCD1}">
-                    <a14:hiddenFill xmlns="" xmlns:a14="http://schemas.microsoft.com/office/drawing/2010/main">
+                    <a14:hiddenFill xmlns:a14="http://schemas.microsoft.com/office/drawing/2010/main" xmlns="">
                       <a:noFill/>
                     </a14:hiddenFill>
                   </a:ext>
@@ -13667,14 +13666,14 @@
               </a:ln>
               <a:extLst>
                 <a:ext uri="{909E8E84-426E-40dd-AFC4-6F175D3DCCD1}">
-                  <a14:hiddenFill xmlns="" xmlns:a14="http://schemas.microsoft.com/office/drawing/2010/main">
+                  <a14:hiddenFill xmlns:a14="http://schemas.microsoft.com/office/drawing/2010/main" xmlns="">
                     <a:solidFill>
                       <a:srgbClr val="FFFFFF"/>
                     </a:solidFill>
                   </a14:hiddenFill>
                 </a:ext>
                 <a:ext uri="{91240B29-F687-4f45-9708-019B960494DF}">
-                  <a14:hiddenLine xmlns="" xmlns:a14="http://schemas.microsoft.com/office/drawing/2010/main" w="9525">
+                  <a14:hiddenLine xmlns:a14="http://schemas.microsoft.com/office/drawing/2010/main" xmlns="" w="9525">
                     <a:solidFill>
                       <a:srgbClr val="000000"/>
                     </a:solidFill>
@@ -14524,7 +14523,7 @@
           <a:p>
             <a:r>
               <a:rPr lang="en-US" noProof="0"/>
-              <a:t>OASYS-Photon transport | HERCULES2025</a:t>
+              <a:t>OASYS-Photon transport | HERCULES2026</a:t>
             </a:r>
             <a:endParaRPr lang="en-US" noProof="0" dirty="0"/>
           </a:p>
@@ -15784,7 +15783,7 @@
           <a:p>
             <a:r>
               <a:rPr lang="en-US" noProof="0"/>
-              <a:t>OASYS-Photon transport | HERCULES2025</a:t>
+              <a:t>OASYS-Photon transport | HERCULES2026</a:t>
             </a:r>
           </a:p>
         </p:txBody>
@@ -18664,7 +18663,7 @@
           <a:p>
             <a:r>
               <a:rPr lang="en-US" noProof="0"/>
-              <a:t>OASYS-Photon transport | HERCULES2025</a:t>
+              <a:t>OASYS-Photon transport | HERCULES2026</a:t>
             </a:r>
           </a:p>
         </p:txBody>
@@ -19089,7 +19088,7 @@
           <a:p>
             <a:r>
               <a:rPr lang="en-US" noProof="0"/>
-              <a:t>OASYS-Photon transport | HERCULES2025</a:t>
+              <a:t>OASYS-Photon transport | HERCULES2026</a:t>
             </a:r>
           </a:p>
         </p:txBody>
@@ -19918,7 +19917,7 @@
           <a:p>
             <a:r>
               <a:rPr lang="en-US" noProof="0"/>
-              <a:t>OASYS-Photon transport | HERCULES2025</a:t>
+              <a:t>OASYS-Photon transport | HERCULES2026</a:t>
             </a:r>
           </a:p>
         </p:txBody>
